--- a/aci-redesign/ACI_Redesign_Strategy.pptx
+++ b/aci-redesign/ACI_Redesign_Strategy.pptx
@@ -10597,7 +10597,7 @@
                           </a:solidFill>
                           <a:latin typeface="Calibri"/>
                         </a:rPr>
-                        <a:t>vmm-vcenter-rcc (lab) / VMM1 (production)</a:t>
+                        <a:t>Per-fabric: APCG-VDS1 (AEDCG), APCK-VDS1 (AEDCK)</a:t>
                       </a:r>
                     </a:p>
                   </a:txBody>
@@ -10645,7 +10645,7 @@
                           </a:solidFill>
                           <a:latin typeface="Calibri"/>
                         </a:rPr>
-                        <a:t>vcenter01 with credential policy</a:t>
+                        <a:t>vcenter01 with credential policy (shared vCenter)</a:t>
                       </a:r>
                     </a:p>
                   </a:txBody>
@@ -10693,7 +10693,7 @@
                           </a:solidFill>
                           <a:latin typeface="Calibri"/>
                         </a:rPr>
-                        <a:t>Created by ACI via dvs_version (6.5 / 6.6 / 7.0 / 8.0)</a:t>
+                        <a:t>Adopted from existing per-fabric VDS (dvs_version='unmanaged')</a:t>
                       </a:r>
                     </a:p>
                   </a:txBody>
@@ -10741,7 +10741,7 @@
                           </a:solidFill>
                           <a:latin typeface="Calibri"/>
                         </a:rPr>
-                        <a:t>vmm-aaep - linked to VMM domain</a:t>
+                        <a:t>vmm-aaep (lab) / fi-aaep (prod, with phys-fi-domain)</a:t>
                       </a:r>
                     </a:p>
                   </a:txBody>
@@ -10789,7 +10789,7 @@
                           </a:solidFill>
                           <a:latin typeface="Calibri"/>
                         </a:rPr>
-                        <a:t>mac-pinning</a:t>
+                        <a:t>mac-pin</a:t>
                       </a:r>
                     </a:p>
                   </a:txBody>
@@ -11020,7 +11020,7 @@
                 </a:solidFill>
                 <a:latin typeface="Calibri"/>
               </a:rPr>
-              <a:t>Production config touch-points</a:t>
+              <a:t>Production config touch-points (Design A: UCS-FI direct attach)</a:t>
             </a:r>
           </a:p>
         </p:txBody>
@@ -11059,7 +11059,7 @@
                 </a:solidFill>
                 <a:latin typeface="Calibri"/>
               </a:rPr>
-              <a:t>•  data/sites/primary/access_policies.nac.yaml - VLAN pool VMM1 = 3501-3967, AAEP infra_vlan, VPC-VMM-HOSTS.</a:t>
+              <a:t>•  data/nac-aci-{aedcg,aedck}-prod/access-policies.nac.yaml - fi-static-vlan-pool (213 VLANs), fi-aaep, PC_FI_A/PC_FI_B policy groups, leaf 152/153 (AEDCG) and 119/191 (AEDCK) split between VMM ports (8-48) and FI uplinks (eth1/6, eth1/7).</a:t>
             </a:r>
           </a:p>
           <a:p>
@@ -11075,7 +11075,7 @@
                 </a:solidFill>
                 <a:latin typeface="Calibri"/>
               </a:rPr>
-              <a:t>•  data/sites/primary/fabric_policies.nac.yaml - VMM1 read-write, tag collection, mac-pinning, uplinks, dvs_version.</a:t>
+              <a:t>•  data/nac-aci-shared/modules.nac.yaml - aci_mcp sub-module disabled so MCP InstP is managed inline in apic-vmware-prod/main.tf.</a:t>
             </a:r>
           </a:p>
           <a:p>
@@ -11091,7 +11091,7 @@
                 </a:solidFill>
                 <a:latin typeface="Calibri"/>
               </a:rPr>
-              <a:t>•  data/ndo/schema_AEDCE.nac.yaml - all 405 EPG site entries bound to VMM1 (dynamic VLAN, immediate deployment).</a:t>
+              <a:t>•  data/nac-ndo/schema-aedce-ipv4.nac.yaml - 39 EPG site entries bound to APCG-VDS1 (AEDCG) and APCK-VDS1 (AEDCK).</a:t>
             </a:r>
           </a:p>
           <a:p>
@@ -11107,7 +11107,7 @@
                 </a:solidFill>
                 <a:latin typeface="Calibri"/>
               </a:rPr>
-              <a:t>•  Replace CHANGE_ME placeholders with real vCenter IP / DC / creds before apply.</a:t>
+              <a:t>•  vCenter creds flow in via TF_VAR_vcenter_* env vars (no CHANGE_ME placeholders in tracked YAML).</a:t>
             </a:r>
           </a:p>
         </p:txBody>
@@ -11521,7 +11521,7 @@
                           </a:solidFill>
                           <a:latin typeface="Calibri"/>
                         </a:rPr>
-                        <a:t>VLAN pool</a:t>
+                        <a:t>VLAN pools</a:t>
                       </a:r>
                     </a:p>
                   </a:txBody>
@@ -11544,7 +11544,7 @@
                           </a:solidFill>
                           <a:latin typeface="Calibri"/>
                         </a:rPr>
-                        <a:t>vmm-vlan-pool (dynamic, 3501-3967)</a:t>
+                        <a:t>vmm-vlan-pool (dynamic, 3501-3967) + fi-static-vlan-pool (static, 213 VLANs, prod)</a:t>
                       </a:r>
                     </a:p>
                   </a:txBody>
@@ -11569,7 +11569,7 @@
                           </a:solidFill>
                           <a:latin typeface="Calibri"/>
                         </a:rPr>
-                        <a:t>CDP / LLDP / LACP</a:t>
+                        <a:t>CDP / LLDP</a:t>
                       </a:r>
                     </a:p>
                   </a:txBody>
@@ -11592,7 +11592,7 @@
                           </a:solidFill>
                           <a:latin typeface="Calibri"/>
                         </a:rPr>
-                        <a:t>cdp-enabled, lldp-enabled, lacp-active</a:t>
+                        <a:t>cdp-enabled, lldp-enabled (admin_rx_state, admin_tx_state)</a:t>
                       </a:r>
                     </a:p>
                   </a:txBody>
@@ -11640,7 +11640,7 @@
                           </a:solidFill>
                           <a:latin typeface="Calibri"/>
                         </a:rPr>
-                        <a:t>mac-pinning</a:t>
+                        <a:t>mac-pin (created from port_channel_policies)</a:t>
                       </a:r>
                     </a:p>
                   </a:txBody>
@@ -11736,7 +11736,7 @@
                           </a:solidFill>
                           <a:latin typeface="Calibri"/>
                         </a:rPr>
-                        <a:t>vmm-vcenter-rcc (read-write, manages VDS)</a:t>
+                        <a:t>Per-fabric: APCG-VDS1 (AEDCG), APCK-VDS1 (AEDCK) - adopt existing VDS</a:t>
                       </a:r>
                     </a:p>
                   </a:txBody>
@@ -11784,7 +11784,7 @@
                           </a:solidFill>
                           <a:latin typeface="Calibri"/>
                         </a:rPr>
-                        <a:t>vcenter01 with credential policy</a:t>
+                        <a:t>vcenter01 with credential policy (shared vCenter)</a:t>
                       </a:r>
                     </a:p>
                   </a:txBody>
@@ -12517,7 +12517,7 @@
                           </a:solidFill>
                           <a:latin typeface="Calibri"/>
                         </a:rPr>
-                        <a:t>36 internal EPGs on vmm-vcenter-rcc (dynamic VLAN)</a:t>
+                        <a:t>36 internal EPGs on per-fabric VMMs (dynamic VLAN)</a:t>
                       </a:r>
                     </a:p>
                   </a:txBody>
@@ -12565,7 +12565,7 @@
                           </a:solidFill>
                           <a:latin typeface="Calibri"/>
                         </a:rPr>
-                        <a:t>3 DMZ EPGs on vmm-vcenter-rcc (dynamic VLAN)</a:t>
+                        <a:t>3 DMZ EPGs on per-fabric VMMs (dynamic VLAN)</a:t>
                       </a:r>
                     </a:p>
                   </a:txBody>
@@ -14686,7 +14686,7 @@
                           </a:solidFill>
                           <a:latin typeface="Calibri"/>
                         </a:rPr>
-                        <a:t>VMM1 → vmm-vcenter-rcc (lab)</a:t>
+                        <a:t>VMM1 → APCG-VDS1 / APCK-VDS1</a:t>
                       </a:r>
                     </a:p>
                   </a:txBody>
@@ -14709,7 +14709,7 @@
                           </a:solidFill>
                           <a:latin typeface="Calibri"/>
                         </a:rPr>
-                        <a:t>Dynamic VLAN assignment</a:t>
+                        <a:t>Dynamic VLAN assignment (per-fabric VDS adoption)</a:t>
                       </a:r>
                     </a:p>
                   </a:txBody>
@@ -15925,7 +15925,7 @@
                 </a:solidFill>
                 <a:latin typeface="Calibri"/>
               </a:rPr>
-              <a:t>•  VMM domain vmm-vcenter-rcc + dynamic VLAN pool 3501-3967</a:t>
+              <a:t>•  Per-fabric VMM domains (APCG-VDS1, APCK-VDS1) + dynamic VLAN pool 3501-3967</a:t>
             </a:r>
           </a:p>
           <a:p>
@@ -17519,7 +17519,7 @@
                 </a:solidFill>
                 <a:latin typeface="Calibri"/>
               </a:rPr>
-              <a:t>Dynamic VLAN pool 3501-3967, vmm-vcenter-rcc</a:t>
+              <a:t>VMM pool 3501-3967 + per-fabric VMMs (APCG-VDS1, APCK-VDS1)</a:t>
             </a:r>
           </a:p>
         </p:txBody>
@@ -21865,7 +21865,7 @@
                 </a:solidFill>
                 <a:latin typeface="Consolas"/>
               </a:rPr>
-              <a:t>export TF_VAR_vcenter_dvs_version='6.6'</a:t>
+              <a:t>export TF_VAR_vcenter_dvs_version='unmanaged'</a:t>
             </a:r>
           </a:p>
         </p:txBody>
@@ -26741,7 +26741,7 @@
                 </a:solidFill>
                 <a:latin typeface="Calibri"/>
               </a:rPr>
-              <a:t>•  EPGs bind to vmm-vcenter-rcc on AEDCG + AEDCK.</a:t>
+              <a:t>•  EPGs bind to APCG-VDS1 (AEDCG) and APCK-VDS1 (AEDCK).</a:t>
             </a:r>
           </a:p>
           <a:p>
@@ -37390,7 +37390,7 @@
                 </a:solidFill>
                 <a:latin typeface="Calibri"/>
               </a:rPr>
-              <a:t>•  Bound to VMM domain vmm-vcenter-rcc</a:t>
+              <a:t>•  Bound to per-fabric VMMs (APCG-VDS1, APCK-VDS1)</a:t>
             </a:r>
           </a:p>
           <a:p>
@@ -38134,7 +38134,7 @@
                 </a:solidFill>
                 <a:latin typeface="Calibri"/>
               </a:rPr>
-              <a:t>•  3 EPGs on vmm-vcenter-rcc</a:t>
+              <a:t>•  3 EPGs on per-fabric VMMs</a:t>
             </a:r>
           </a:p>
           <a:p>
